--- a/ai-beginner-bootcamp-outline/day_2/Day_2_Slides.pptx
+++ b/ai-beginner-bootcamp-outline/day_2/Day_2_Slides.pptx
@@ -510,7 +510,7 @@
           <a:lstStyle/>
           <a:p>
             <a:r>
-              <a:t>Open with energy. Say: 'Yesterday we gave our AI a brain. Today we give it hands.' Remind the room that on Day 1 they learned how to prompt and shape an AI's thinking, and that everything they built was still trapped inside a conversation box. Today changes that. Reassure the non-technical folks in the room that nothing here requires programming, only clear thinking about what work needs doing. Ask for a quick show of hands: who has ever asked an AI something and gotten an answer that was confidently out of date? Keep that memory alive, because the next slide explains it.</a:t>
+              <a:t>Welcome back, everyone! Big congratulations — yesterday you built something most people only talk about: an AI that remembers YOUR notes, YOUR documents, YOUR world. But let me ask you something. What happens when you ask it, 'What's the dollar rate today?' or 'Who won the match last night?' It goes quiet, or worse, it makes something up. That's because right now your Second Brain is like a brilliant professor locked in a room with no windows, no phone, no internet. Today we open the door. We're giving it hands — the ability to reach OUT into the world, grab information, and do things. Stay with me, because this is the day the magic gets real.</a:t>
             </a:r>
           </a:p>
         </p:txBody>
@@ -580,7 +580,7 @@
           <a:lstStyle/>
           <a:p>
             <a:r>
-              <a:t>Use a picture the room can feel: imagine hiring the most well-read graduate in Nigeria, then locking them in a room with no phone, no internet, and no filing cabinet. Ask them for last month's sales figures and they will either say 'I don't know' or, worse, invent something that sounds right. That is a language model without tools. Emphasise gently that hallucination is often not stupidity, it is a missing connection to reality. Land the point clearly: most people try to solve this with better prompting, but the real solution is giving the model a door to the outside world.</a:t>
+              <a:t>Let's be honest about the limits. Every AI model has what we call a 'knowledge cutoff' — a date after which it simply knows nothing. Ask it about an event from last week and it will either say 'I don't know' or, more dangerously, it will invent a very convincing answer. That's hallucination, and it's not lying — it's a prediction machine doing its best with no information. Yesterday we solved half the problem: we fed it your personal documents so it knows YOUR context. But there's a second half. Even with perfect memory, it still can't check today's exchange rate, send an email, or read a live spreadsheet. Memory is knowing. Tools are doing. Today is about doing.</a:t>
             </a:r>
           </a:p>
         </p:txBody>
@@ -650,7 +650,7 @@
           <a:lstStyle/>
           <a:p>
             <a:r>
-              <a:t>Define the term simply and then de-mystify it. A tool is just a described capability. In practice a tool has three parts: a name, a description of when it should be used, and the inputs it expects. That description is written in plain English, which is why this is a knowledge worker skill and not just a developer skill. Give a concrete example out loud: a tool called search_web, described as 'use this whenever you need current information you do not already know', which takes one input, a search query. Stress that the AI decides when to reach for it, based on the description you wrote. Bad description, bad decisions.</a:t>
+              <a:t>So what is a tool, in plain English? Imagine you hire a brilliant new intern on their first day. They're smart, but they don't know your business. You say: 'Here's the office phone — use it when a customer calls. Here's the calculator — use it for anything with numbers. Here's the company Google account — use it when you need to look something up.' You didn't teach them HOW to be smart. You gave them capabilities and told them WHEN to use each one. That's exactly what a tool is for an AI. You describe the tool in plain language — 'Use this to search the internet for current information' — and the AI decides on its own when that tool is the right one for the job. That description you write? It matters more than you think. We'll come back to that.</a:t>
             </a:r>
           </a:p>
         </p:txBody>
@@ -720,7 +720,7 @@
           <a:lstStyle/>
           <a:p>
             <a:r>
-              <a:t>Explain why we start with search rather than anything flashier. It solves the pain everyone already feels, and it makes the AI's answers verifiable. Walk through what happens under the hood in human terms: you ask a question, the AI decides it needs fresh facts, it writes a search query the way a skilled researcher would, it reads the returned pages, and then it summarises with citations. Highlight the underrated part, which is that the AI is often better than us at writing several good queries quickly. If you have a live demo available, run one real question here, ideally something time-sensitive like current market prices or a policy change, so the room sees the difference against yesterday's tool-free answer.</a:t>
+              <a:t>Here's the heart of today. This is called the Think-Act-Observe loop, sometimes called ReAct — reasoning plus acting. Watch how it works. You ask: 'What's the fuel price today?' The AI THINKS: 'Hmm, that's current information, I don't have it, but I have a search tool.' It ACTS: it calls that search tool with a query it writes itself. It OBSERVES: it reads the results that come back. Then it decides — do I have enough to answer, or do I need to search again? Maybe the first result was about last year, so it loops and tries a better query. That looping is the difference between a chatbot and an agent. A chatbot answers. An agent works until the job is done. Sit with that for a second, because once you see it, you can't unsee it — this is how every AI agent you've ever heard about actually works under the hood.</a:t>
             </a:r>
           </a:p>
         </p:txBody>
@@ -790,7 +790,7 @@
           <a:lstStyle/>
           <a:p>
             <a:r>
-              <a:t>This is the core concept of the whole bootcamp, so slow down here. Draw the loop on the board if you can. Explain that a tool-using AI is not a one-shot question and answer any more, it is a small cycle of reasoning and action, and it can go around that cycle several times. Give a worked example aloud: 'What is the naira equivalent of our new $49 subscription price, and how does that compare to last quarter?' The AI searches for today's rate, observes it, realises it also needs the older rate, searches again, does the arithmetic, and only then answers. Name the pattern for them so it sticks: this loop is what people mean when they say 'agent'. Everything on Days 3 through 5 is built on it.</a:t>
+              <a:t>Search is the first tool we're plugging in, and it's the one that changes everything fastest. Here's what's beautiful about it: you don't have to write the search query. You ask in your normal voice — 'Is there any news that affects my business proposal?' — and the AI translates that into a proper search query, runs it, reads the results, and reports back. Now, here's the real power move, and this is what separates you from everyone else on LinkedIn playing with ChatGPT. Combine it with Day 1. Your Second Brain reads YOUR client proposal from your notes, then searches the web for that client's latest news, then tells you what to change in your pitch. Private context plus live world. Nobody else has that combination — because nobody else has your notes. One rule though: always ask it to give you the source links. Trust, but verify. Always.</a:t>
             </a:r>
           </a:p>
         </p:txBody>
@@ -860,7 +860,7 @@
           <a:lstStyle/>
           <a:p>
             <a:r>
-              <a:t>Move from the single search tool to the wider picture, but keep the advice restrained. Go through each category and ask the room which one would save them the most time this week. The calculator point deserves a moment: models predict text, so they can be wrong on exact figures, and handing arithmetic to a real calculator is a genuine reliability upgrade rather than a nice-to-have. End with the discipline point, because it is the mistake most beginners make. Too many overlapping tools means the AI picks the wrong one. Fewer, clearly described tools beat a long list every time. Tell them today's build uses just search plus a calculator.</a:t>
+              <a:t>Search is the doorway, but the house is much bigger. Let me show you the categories. First, READ tools — your agent can open a Google Sheet, pull a PDF, scrape a webpage, check your inbox. Second, WRITE tools — and this is where people gasp — it can send the email, book the meeting, update the record. Third, CALCULATE — please, always give your AI a real calculator, because language models are famously bad at maths; they're predicting words, not computing numbers. And fourth, CONNECT — through platforms like n8n, Make, or Zapier, you can wire your Second Brain into WhatsApp, Slack, Notion, almost anything. Here's my rule of thumb for you: if a task can be done by a human with a login and a browser, there is very likely a tool that lets your agent do it too. Start writing down the boring tasks in your week. Those are your first tools.</a:t>
             </a:r>
           </a:p>
         </p:txBody>
@@ -930,7 +930,7 @@
           <a:lstStyle/>
           <a:p>
             <a:r>
-              <a:t>This slide protects them from an expensive lesson, so do not rush it. Explain that search-grounded answers are far more trustworthy, but the AI is still summarising, and summaries can drift from the source. Insisting on links makes verification cheap. Then make the permissions point vivid with a simple contrast: an assistant that reads your inbox is helpful, an assistant that sends from your inbox unsupervised is a risk to your reputation. Offer the rule of thumb they should carry out of the room: automate reading and drafting freely, and require a human click for sending, paying, publishing, or deleting. Frame this as professional judgement, not fear.</a:t>
+              <a:t>Now let's have the grown-up conversation. The moment you give an AI hands, it can break things. Not out of malice — out of misunderstanding. So we build guardrails, and these five are non-negotiable. One: start read-only. Let it look at your data for a week before you let it change anything. Two: human-in-the-loop. For anything that sends, posts, pays, or deletes — it drafts, YOU approve. Two clicks of your time, zero disasters. Three: least privilege. Don't connect your whole Google Drive; connect one folder. Four — and this trips up almost everyone — write clear tool descriptions. If two tools have vague, overlapping descriptions, the AI will pick the wrong one, and you'll blame the AI when really it was the instructions. Five: keep logs. Every professional agent builder I know checks logs daily. This isn't paranoia; it's how you build something you can actually put in front of a client.</a:t>
             </a:r>
           </a:p>
         </p:txBody>
@@ -1000,7 +1000,7 @@
           <a:lstStyle/>
           <a:p>
             <a:r>
-              <a:t>Shift into build mode and set clear expectations for the lab. Everyone will end the session with a working assistant that can answer questions about things that happened this week. Encourage them to test it with a question from their actual job rather than a toy example, because that is where the insight lives. Ask them to watch the tool calls as they happen, since seeing the AI choose a tool makes the concept concrete in a way slides cannot. For homework, keep it light: one paragraph describing a tool they wish they had, in plain language. Close warmly. Say: 'You gave it hands today. Tomorrow we give it memory, so it stops forgetting everything you told it.'</a:t>
+              <a:t>Alright — hands on keyboards. Your mission today is simple but powerful. Step one: connect the search tool to the Second Brain you built yesterday. We'll walk through it together, click by click. Step two: run three tests. Ask something only your notes know. Ask something only the internet knows. Then — and this is the moment I want you to feel — ask something that needs both. Something like: 'Based on my project notes, what's happening in the market this week that I should worry about?' When that answer comes back, screenshot it, because that's the day you stopped using AI and started building with it. Step three: open a notebook and list three tasks you do every single week that bore you to death. Bring them tomorrow, because Day 3 is when we chain these tools together and let your agent run multi-step workflows on its own. Drop your best result in the community channel tonight — I read every single one. Excellent work today. See you tomorrow.</a:t>
             </a:r>
           </a:p>
         </p:txBody>
@@ -4121,7 +4121,7 @@
               </a:defRPr>
             </a:pPr>
             <a:r>
-              <a:t>Day 2: Give It Hands</a:t>
+              <a:t>Day 2: Give It Hands 🖐️</a:t>
             </a:r>
           </a:p>
         </p:txBody>
@@ -4151,7 +4151,7 @@
               </a:defRPr>
             </a:pPr>
             <a:r>
-              <a:t>Yesterday your AI could think and talk. Today it can act.</a:t>
+              <a:t>Yesterday we gave your Second Brain a memory. Today we give it hands.</a:t>
             </a:r>
           </a:p>
           <a:p>
@@ -4164,7 +4164,7 @@
               </a:defRPr>
             </a:pPr>
             <a:r>
-              <a:t>Tools are what turn a clever chatbot into a working assistant.</a:t>
+              <a:t>A brain that can only think is a genius trapped in a locked room.</a:t>
             </a:r>
           </a:p>
           <a:p>
@@ -4177,7 +4177,7 @@
               </a:defRPr>
             </a:pPr>
             <a:r>
-              <a:t>By the end of today you will have built an assistant that researches live information for you.</a:t>
+              <a:t>By the end of today: your AI will search the web, read live data, and take real actions.</a:t>
             </a:r>
           </a:p>
           <a:p>
@@ -4190,7 +4190,7 @@
               </a:defRPr>
             </a:pPr>
             <a:r>
-              <a:t>No coding background needed. If you can write clear instructions, you can do this.</a:t>
+              <a:t>No coding background needed — we build the concept first, the clicks second.</a:t>
             </a:r>
           </a:p>
         </p:txBody>
@@ -4245,7 +4245,7 @@
               </a:defRPr>
             </a:pPr>
             <a:r>
-              <a:t>The Problem: A Brilliant Assistant Locked in a Room</a:t>
+              <a:t>The Problem: A Brain in a Jar</a:t>
             </a:r>
           </a:p>
         </p:txBody>
@@ -4275,7 +4275,7 @@
               </a:defRPr>
             </a:pPr>
             <a:r>
-              <a:t>A plain language model only knows what it learned during training. It has a cutoff date.</a:t>
+              <a:t>LLMs are frozen in time — they only know what they were trained on.</a:t>
             </a:r>
           </a:p>
           <a:p>
@@ -4288,7 +4288,7 @@
               </a:defRPr>
             </a:pPr>
             <a:r>
-              <a:t>It cannot check today's exchange rate, read your company's price list, or open your inbox.</a:t>
+              <a:t>'Knowledge cutoff' means yesterday's news might as well be next century.</a:t>
             </a:r>
           </a:p>
           <a:p>
@@ -4301,7 +4301,7 @@
               </a:defRPr>
             </a:pPr>
             <a:r>
-              <a:t>When it does not know, it sometimes guesses fluently. That is where hallucinations come from.</a:t>
+              <a:t>When they don't know, they guess confidently. We call this hallucination.</a:t>
             </a:r>
           </a:p>
           <a:p>
@@ -4314,7 +4314,7 @@
               </a:defRPr>
             </a:pPr>
             <a:r>
-              <a:t>The fix is not a smarter brain. The fix is access.</a:t>
+              <a:t>Your notes (Day 1) fixed WHAT it knows. Tools fix what it can DO.</a:t>
             </a:r>
           </a:p>
         </p:txBody>
@@ -4369,7 +4369,7 @@
               </a:defRPr>
             </a:pPr>
             <a:r>
-              <a:t>So What Is a 'Tool', Really?</a:t>
+              <a:t>What Exactly Is a 'Tool'?</a:t>
             </a:r>
           </a:p>
         </p:txBody>
@@ -4399,7 +4399,7 @@
               </a:defRPr>
             </a:pPr>
             <a:r>
-              <a:t>A tool is any action you allow the AI to take outside the conversation.</a:t>
+              <a:t>A tool is any capability you hand the AI that it can choose to use.</a:t>
             </a:r>
           </a:p>
           <a:p>
@@ -4412,7 +4412,7 @@
               </a:defRPr>
             </a:pPr>
             <a:r>
-              <a:t>Searching the web. Reading a document. Doing arithmetic. Sending an email. Querying a database.</a:t>
+              <a:t>Think of it like giving an intern a phone, a calculator, and a Google login.</a:t>
             </a:r>
           </a:p>
           <a:p>
@@ -4425,7 +4425,7 @@
               </a:defRPr>
             </a:pPr>
             <a:r>
-              <a:t>You describe the tool in plain language: what it does, when to use it, what it needs from the AI.</a:t>
+              <a:t>Each tool has a name, a description, and clear instructions on when to use it.</a:t>
             </a:r>
           </a:p>
           <a:p>
@@ -4438,7 +4438,7 @@
               </a:defRPr>
             </a:pPr>
             <a:r>
-              <a:t>The AI does not gain magic powers. It gains permission and a way to ask.</a:t>
+              <a:t>Examples: Web Search, Calculator, Send Email, Read Google Sheet, Check Calendar.</a:t>
             </a:r>
           </a:p>
         </p:txBody>
@@ -4493,7 +4493,7 @@
               </a:defRPr>
             </a:pPr>
             <a:r>
-              <a:t>Search: The First Hand to Give It</a:t>
+              <a:t>How the AI Decides: The Think–Act–Observe Loop</a:t>
             </a:r>
           </a:p>
         </p:txBody>
@@ -4523,7 +4523,7 @@
               </a:defRPr>
             </a:pPr>
             <a:r>
-              <a:t>Search is the highest-value tool because it fixes the biggest weakness: stale or missing knowledge.</a:t>
+              <a:t>THINK: 'The user wants today's fuel price. I don't know that. I need to search.'</a:t>
             </a:r>
           </a:p>
           <a:p>
@@ -4536,7 +4536,7 @@
               </a:defRPr>
             </a:pPr>
             <a:r>
-              <a:t>The AI writes its own search queries, reads the results, and pulls out what matters.</a:t>
+              <a:t>ACT: The AI calls the Search tool with the query 'fuel price Nigeria today'.</a:t>
             </a:r>
           </a:p>
           <a:p>
@@ -4549,7 +4549,7 @@
               </a:defRPr>
             </a:pPr>
             <a:r>
-              <a:t>You get answers grounded in sources you can actually click and check.</a:t>
+              <a:t>OBSERVE: The tool returns real results. The AI reads them.</a:t>
             </a:r>
           </a:p>
           <a:p>
@@ -4562,7 +4562,20 @@
               </a:defRPr>
             </a:pPr>
             <a:r>
-              <a:t>This alone turns hours of tab-hopping research into a two-minute request.</a:t>
+              <a:t>REPEAT or ANSWER: Enough info? Answer. Not enough? Loop again.</a:t>
+            </a:r>
+          </a:p>
+          <a:p>
+            <a:pPr>
+              <a:defRPr sz="2400">
+                <a:solidFill>
+                  <a:srgbClr val="FFFFFF"/>
+                </a:solidFill>
+                <a:latin typeface="Arial"/>
+              </a:defRPr>
+            </a:pPr>
+            <a:r>
+              <a:t>This loop is what turns a chatbot into an agent.</a:t>
             </a:r>
           </a:p>
         </p:txBody>
@@ -4617,7 +4630,7 @@
               </a:defRPr>
             </a:pPr>
             <a:r>
-              <a:t>The Loop That Makes It Work: Think, Act, Observe, Repeat</a:t>
+              <a:t>Tool #1: Web Search — Your AI's Window to the World</a:t>
             </a:r>
           </a:p>
         </p:txBody>
@@ -4647,7 +4660,7 @@
               </a:defRPr>
             </a:pPr>
             <a:r>
-              <a:t>Think: the AI decides whether it needs help and which tool fits.</a:t>
+              <a:t>Search gives your Second Brain today's information, not last year's.</a:t>
             </a:r>
           </a:p>
           <a:p>
@@ -4660,7 +4673,7 @@
               </a:defRPr>
             </a:pPr>
             <a:r>
-              <a:t>Act: it calls the tool with specific inputs it wrote itself.</a:t>
+              <a:t>The AI writes its own search query — you just ask naturally.</a:t>
             </a:r>
           </a:p>
           <a:p>
@@ -4673,7 +4686,7 @@
               </a:defRPr>
             </a:pPr>
             <a:r>
-              <a:t>Observe: the tool's result comes back and becomes new information.</a:t>
+              <a:t>It reads the top results and summarises them back with sources.</a:t>
             </a:r>
           </a:p>
           <a:p>
@@ -4686,7 +4699,20 @@
               </a:defRPr>
             </a:pPr>
             <a:r>
-              <a:t>Repeat: it loops until it has enough, then answers you.</a:t>
+              <a:t>Killer combo: your private notes + live web = answers nobody else can get.</a:t>
+            </a:r>
+          </a:p>
+          <a:p>
+            <a:pPr>
+              <a:defRPr sz="2400">
+                <a:solidFill>
+                  <a:srgbClr val="FFFFFF"/>
+                </a:solidFill>
+                <a:latin typeface="Arial"/>
+              </a:defRPr>
+            </a:pPr>
+            <a:r>
+              <a:t>Always ask for links — trust, but verify.</a:t>
             </a:r>
           </a:p>
         </p:txBody>
@@ -4741,7 +4767,7 @@
               </a:defRPr>
             </a:pPr>
             <a:r>
-              <a:t>Building Your Toolbelt</a:t>
+              <a:t>Beyond Search: The Tools That Do Real Work</a:t>
             </a:r>
           </a:p>
         </p:txBody>
@@ -4771,7 +4797,7 @@
               </a:defRPr>
             </a:pPr>
             <a:r>
-              <a:t>Search and web browsing for anything current or external.</a:t>
+              <a:t>Read: Google Sheets, PDFs, websites, your email inbox.</a:t>
             </a:r>
           </a:p>
           <a:p>
@@ -4784,7 +4810,7 @@
               </a:defRPr>
             </a:pPr>
             <a:r>
-              <a:t>Documents and files so it can read your reports, contracts, and spreadsheets.</a:t>
+              <a:t>Write: send emails, post updates, create calendar events, update a database.</a:t>
             </a:r>
           </a:p>
           <a:p>
@@ -4797,7 +4823,7 @@
               </a:defRPr>
             </a:pPr>
             <a:r>
-              <a:t>A calculator or code runner, because language models are shaky at precise maths.</a:t>
+              <a:t>Calculate: real maths, not the AI's shaky mental arithmetic.</a:t>
             </a:r>
           </a:p>
           <a:p>
@@ -4810,7 +4836,7 @@
               </a:defRPr>
             </a:pPr>
             <a:r>
-              <a:t>Your work systems: calendar, email, CRM, internal databases.</a:t>
+              <a:t>Connect: WhatsApp, Slack, Notion, Airtable via automation platforms.</a:t>
             </a:r>
           </a:p>
           <a:p>
@@ -4823,7 +4849,7 @@
               </a:defRPr>
             </a:pPr>
             <a:r>
-              <a:t>Start with two or three tools. A cluttered toolbelt confuses the AI.</a:t>
+              <a:t>Rule of thumb: if you can do it with a login, your agent probably can too.</a:t>
             </a:r>
           </a:p>
         </p:txBody>
@@ -4878,7 +4904,7 @@
               </a:defRPr>
             </a:pPr>
             <a:r>
-              <a:t>Trust, But Verify</a:t>
+              <a:t>Guardrails: With Hands Comes Responsibility</a:t>
             </a:r>
           </a:p>
         </p:txBody>
@@ -4908,7 +4934,7 @@
               </a:defRPr>
             </a:pPr>
             <a:r>
-              <a:t>Tools reduce hallucination, they do not eliminate it. The AI can still misread a source.</a:t>
+              <a:t>Read-only first. Let it look before you let it touch.</a:t>
             </a:r>
           </a:p>
           <a:p>
@@ -4921,7 +4947,7 @@
               </a:defRPr>
             </a:pPr>
             <a:r>
-              <a:t>Always demand citations, then spot-check the ones that matter.</a:t>
+              <a:t>Human-in-the-loop: require your approval before it sends or deletes anything.</a:t>
             </a:r>
           </a:p>
           <a:p>
@@ -4934,7 +4960,7 @@
               </a:defRPr>
             </a:pPr>
             <a:r>
-              <a:t>Be deliberate about permissions: reading is low risk, sending and deleting are not.</a:t>
+              <a:t>Least privilege: give access to ONE folder, not your entire Drive.</a:t>
             </a:r>
           </a:p>
           <a:p>
@@ -4947,7 +4973,20 @@
               </a:defRPr>
             </a:pPr>
             <a:r>
-              <a:t>Keep a human in the loop for anything that costs money, leaves your organisation, or cannot be undone.</a:t>
+              <a:t>Write crystal-clear tool descriptions — vague descriptions cause wrong tool choices.</a:t>
+            </a:r>
+          </a:p>
+          <a:p>
+            <a:pPr>
+              <a:defRPr sz="2400">
+                <a:solidFill>
+                  <a:srgbClr val="FFFFFF"/>
+                </a:solidFill>
+                <a:latin typeface="Arial"/>
+              </a:defRPr>
+            </a:pPr>
+            <a:r>
+              <a:t>Log everything. If you can't see what it did, you can't trust it.</a:t>
             </a:r>
           </a:p>
         </p:txBody>
@@ -5002,7 +5041,7 @@
               </a:defRPr>
             </a:pPr>
             <a:r>
-              <a:t>Hands-On: Your Research Assistant</a:t>
+              <a:t>Your Day 2 Mission 🎯</a:t>
             </a:r>
           </a:p>
         </p:txBody>
@@ -5032,7 +5071,7 @@
               </a:defRPr>
             </a:pPr>
             <a:r>
-              <a:t>Lab: build an assistant with two tools, search and a calculator.</a:t>
+              <a:t>Connect a web search tool to the Second Brain you built yesterday.</a:t>
             </a:r>
           </a:p>
           <a:p>
@@ -5045,7 +5084,7 @@
               </a:defRPr>
             </a:pPr>
             <a:r>
-              <a:t>Test it on a question that needs today's information, not last year's.</a:t>
+              <a:t>Test it: ask one question about your own notes, then one about today's news.</a:t>
             </a:r>
           </a:p>
           <a:p>
@@ -5058,7 +5097,7 @@
               </a:defRPr>
             </a:pPr>
             <a:r>
-              <a:t>Watch the loop run and see which tool it reaches for, and when.</a:t>
+              <a:t>Then ask a hybrid question that needs BOTH — that's the real win.</a:t>
             </a:r>
           </a:p>
           <a:p>
@@ -5071,7 +5110,7 @@
               </a:defRPr>
             </a:pPr>
             <a:r>
-              <a:t>Homework: pick one research task you do every week and write the tool description for it.</a:t>
+              <a:t>List 3 boring weekly tasks you'd love to hand over. Those are tomorrow's tools.</a:t>
             </a:r>
           </a:p>
           <a:p>
@@ -5084,7 +5123,7 @@
               </a:defRPr>
             </a:pPr>
             <a:r>
-              <a:t>Tomorrow, Day 3: giving your assistant memory.</a:t>
+              <a:t>Share your best hybrid answer in the community channel tonight.</a:t>
             </a:r>
           </a:p>
         </p:txBody>
